--- a/src/web_interface/static/presentations/roadmap.pptx
+++ b/src/web_interface/static/presentations/roadmap.pptx
@@ -107,7 +107,7 @@
   <p:extLst>
     <p:ext uri="{521415D9-36F7-43E2-AB2F-B90AF26B5E84}">
       <p14:sectionLst xmlns:p14="http://schemas.microsoft.com/office/powerpoint/2010/main">
-        <p14:section name="Roadmap" id="{e24d8de6-00bd-f173-3667-22c1cc21ed39}">
+        <p14:section name="Roadmap" id="{0ba7ce7a-63e3-96c6-9c60-17a46efe2d3f}">
           <p14:sldIdLst>
             <p14:sldId id="256"/>
           </p14:sldIdLst>
@@ -646,7 +646,7 @@
       </p:grpSpPr>
       <p:pic>
         <p:nvPicPr>
-          <p:cNvPr id="2" name="Image 0" descr="/var/folders/pl/_b6qn8zs2_lc59t589_46cyc0000gn/T/drivetest-presentations-rNxAPW/ericsson-logo-black.png">    </p:cNvPr>
+          <p:cNvPr id="2" name="Image 0" descr="/var/folders/pl/_b6qn8zs2_lc59t589_46cyc0000gn/T/drivetest-presentations-0nCbo0/ericsson-logo-black.png">    </p:cNvPr>
           <p:cNvPicPr>
             <a:picLocks noChangeAspect="1"/>
           </p:cNvPicPr>
@@ -831,7 +831,7 @@
       </p:grpSpPr>
       <p:pic>
         <p:nvPicPr>
-          <p:cNvPr id="2" name="Image 0" descr="/var/folders/pl/_b6qn8zs2_lc59t589_46cyc0000gn/T/drivetest-presentations-rNxAPW/ericsson-logo-black.png">    </p:cNvPr>
+          <p:cNvPr id="2" name="Image 0" descr="/var/folders/pl/_b6qn8zs2_lc59t589_46cyc0000gn/T/drivetest-presentations-0nCbo0/ericsson-logo-black.png">    </p:cNvPr>
           <p:cNvPicPr>
             <a:picLocks noChangeAspect="1"/>
           </p:cNvPicPr>
@@ -1289,7 +1289,7 @@
       </p:grpSpPr>
       <p:pic>
         <p:nvPicPr>
-          <p:cNvPr id="2" name="Roadmap road" descr="/var/folders/pl/_b6qn8zs2_lc59t589_46cyc0000gn/T/drivetest-presentations-rNxAPW/roadmap-road.png">    </p:cNvPr>
+          <p:cNvPr id="2" name="Roadmap road" descr="/var/folders/pl/_b6qn8zs2_lc59t589_46cyc0000gn/T/drivetest-presentations-0nCbo0/roadmap-road.png">    </p:cNvPr>
           <p:cNvPicPr>
             <a:picLocks noChangeAspect="1"/>
           </p:cNvPicPr>
